--- a/ppt/FORGE_AI_25_EN.pptx
+++ b/ppt/FORGE_AI_25_EN.pptx
@@ -13342,6 +13342,17 @@
               <a:buNone/>
             </a:pPr>
             <a:r>
+              <a:rPr lang="en-US" altLang="zh-CN" sz="1800" dirty="0">
+                <a:solidFill>
+                  <a:srgbClr val="7E8D9E"/>
+                </a:solidFill>
+                <a:latin typeface="Calibri" pitchFamily="34" charset="0"/>
+                <a:ea typeface="Calibri" pitchFamily="34" charset="-122"/>
+                <a:cs typeface="Calibri" pitchFamily="34" charset="-120"/>
+              </a:rPr>
+              <a:t>Revolutionize Your Innovation Process </a:t>
+            </a:r>
+            <a:r>
               <a:rPr lang="en-US" sz="1800" dirty="0">
                 <a:solidFill>
                   <a:srgbClr val="7E8D9E"/>
@@ -13350,7 +13361,7 @@
                 <a:ea typeface="Calibri" pitchFamily="34" charset="-122"/>
                 <a:cs typeface="Calibri" pitchFamily="34" charset="-120"/>
               </a:rPr>
-              <a:t>FORGE AI — The AI-Native R&amp;D Platform</a:t>
+              <a:t>— The AI-Native R&amp;D Platform</a:t>
             </a:r>
             <a:endParaRPr lang="en-US" sz="1800" dirty="0"/>
           </a:p>
@@ -19197,7 +19208,7 @@
         </p:nvSpPr>
         <p:spPr>
           <a:xfrm>
-            <a:off x="731520" y="1005840"/>
+            <a:off x="731520" y="500002"/>
             <a:ext cx="7772400" cy="914400"/>
           </a:xfrm>
           <a:prstGeom prst="rect">
@@ -19225,7 +19236,7 @@
                 <a:ea typeface="Georgia" pitchFamily="34" charset="-122"/>
                 <a:cs typeface="Georgia" pitchFamily="34" charset="-120"/>
               </a:rPr>
-              <a:t>This Is AI-Native R&amp;D</a:t>
+              <a:t>AI-Native R&amp;D </a:t>
             </a:r>
             <a:endParaRPr lang="en-US" sz="3600" dirty="0"/>
           </a:p>
@@ -19239,7 +19250,7 @@
         </p:nvSpPr>
         <p:spPr>
           <a:xfrm>
-            <a:off x="731520" y="2011680"/>
+            <a:off x="731520" y="1505842"/>
             <a:ext cx="2743200" cy="0"/>
           </a:xfrm>
           <a:prstGeom prst="line">
@@ -19269,7 +19280,7 @@
         </p:nvSpPr>
         <p:spPr>
           <a:xfrm>
-            <a:off x="731520" y="2240280"/>
+            <a:off x="731520" y="1734442"/>
             <a:ext cx="7772400" cy="502920"/>
           </a:xfrm>
           <a:prstGeom prst="rect">
@@ -19286,15 +19297,14 @@
               <a:buNone/>
             </a:pPr>
             <a:r>
-              <a:rPr lang="en-US" sz="1800" dirty="0">
+              <a:rPr lang="en-US" dirty="0">
                 <a:solidFill>
                   <a:srgbClr val="EBE8E3"/>
                 </a:solidFill>
                 <a:latin typeface="Calibri" pitchFamily="34" charset="0"/>
-                <a:ea typeface="Calibri" pitchFamily="34" charset="-122"/>
-                <a:cs typeface="Calibri" pitchFamily="34" charset="-120"/>
-              </a:rPr>
-              <a:t>For Every Materials Company</a:t>
+                <a:cs typeface="Calibri" pitchFamily="34" charset="-120"/>
+              </a:rPr>
+              <a:t>Revolutionize Your Innovation Process</a:t>
             </a:r>
             <a:endParaRPr lang="en-US" sz="1800" dirty="0"/>
           </a:p>
@@ -19308,7 +19318,7 @@
         </p:nvSpPr>
         <p:spPr>
           <a:xfrm>
-            <a:off x="731520" y="2697480"/>
+            <a:off x="731520" y="2191642"/>
             <a:ext cx="7772400" cy="411480"/>
           </a:xfrm>
           <a:prstGeom prst="rect">
@@ -19347,7 +19357,7 @@
         </p:nvSpPr>
         <p:spPr>
           <a:xfrm>
-            <a:off x="777240" y="3246120"/>
+            <a:off x="777240" y="2740282"/>
             <a:ext cx="54864" cy="54864"/>
           </a:xfrm>
           <a:prstGeom prst="rect">
@@ -19374,7 +19384,7 @@
         </p:nvSpPr>
         <p:spPr>
           <a:xfrm>
-            <a:off x="960120" y="3191256"/>
+            <a:off x="960120" y="2685418"/>
             <a:ext cx="7315200" cy="182880"/>
           </a:xfrm>
           <a:prstGeom prst="rect">
@@ -19413,7 +19423,7 @@
         </p:nvSpPr>
         <p:spPr>
           <a:xfrm>
-            <a:off x="777240" y="3447288"/>
+            <a:off x="777240" y="2941450"/>
             <a:ext cx="54864" cy="54864"/>
           </a:xfrm>
           <a:prstGeom prst="rect">
@@ -19440,7 +19450,7 @@
         </p:nvSpPr>
         <p:spPr>
           <a:xfrm>
-            <a:off x="960120" y="3392424"/>
+            <a:off x="960120" y="2886586"/>
             <a:ext cx="7315200" cy="182880"/>
           </a:xfrm>
           <a:prstGeom prst="rect">
@@ -19479,7 +19489,7 @@
         </p:nvSpPr>
         <p:spPr>
           <a:xfrm>
-            <a:off x="777240" y="3648456"/>
+            <a:off x="777240" y="3142618"/>
             <a:ext cx="54864" cy="54864"/>
           </a:xfrm>
           <a:prstGeom prst="rect">
@@ -19506,7 +19516,7 @@
         </p:nvSpPr>
         <p:spPr>
           <a:xfrm>
-            <a:off x="960120" y="3593592"/>
+            <a:off x="960120" y="3087754"/>
             <a:ext cx="7315200" cy="182880"/>
           </a:xfrm>
           <a:prstGeom prst="rect">
@@ -19545,7 +19555,7 @@
         </p:nvSpPr>
         <p:spPr>
           <a:xfrm>
-            <a:off x="777240" y="3849624"/>
+            <a:off x="777240" y="3343786"/>
             <a:ext cx="54864" cy="54864"/>
           </a:xfrm>
           <a:prstGeom prst="rect">
@@ -19572,7 +19582,7 @@
         </p:nvSpPr>
         <p:spPr>
           <a:xfrm>
-            <a:off x="960120" y="3794760"/>
+            <a:off x="960120" y="3288922"/>
             <a:ext cx="7315200" cy="182880"/>
           </a:xfrm>
           <a:prstGeom prst="rect">
@@ -19611,7 +19621,7 @@
         </p:nvSpPr>
         <p:spPr>
           <a:xfrm>
-            <a:off x="777240" y="4050792"/>
+            <a:off x="777240" y="3544954"/>
             <a:ext cx="54864" cy="54864"/>
           </a:xfrm>
           <a:prstGeom prst="rect">
@@ -19638,7 +19648,7 @@
         </p:nvSpPr>
         <p:spPr>
           <a:xfrm>
-            <a:off x="960120" y="3995928"/>
+            <a:off x="960120" y="3490090"/>
             <a:ext cx="7315200" cy="182880"/>
           </a:xfrm>
           <a:prstGeom prst="rect">
@@ -19677,7 +19687,7 @@
         </p:nvSpPr>
         <p:spPr>
           <a:xfrm>
-            <a:off x="777240" y="4251960"/>
+            <a:off x="777240" y="3746122"/>
             <a:ext cx="54864" cy="54864"/>
           </a:xfrm>
           <a:prstGeom prst="rect">
@@ -19704,7 +19714,7 @@
         </p:nvSpPr>
         <p:spPr>
           <a:xfrm>
-            <a:off x="960120" y="4197096"/>
+            <a:off x="960120" y="3691258"/>
             <a:ext cx="7315200" cy="182880"/>
           </a:xfrm>
           <a:prstGeom prst="rect">
@@ -19743,7 +19753,7 @@
         </p:nvSpPr>
         <p:spPr>
           <a:xfrm>
-            <a:off x="777240" y="4453128"/>
+            <a:off x="777240" y="3947290"/>
             <a:ext cx="54864" cy="54864"/>
           </a:xfrm>
           <a:prstGeom prst="rect">
@@ -19770,7 +19780,7 @@
         </p:nvSpPr>
         <p:spPr>
           <a:xfrm>
-            <a:off x="960120" y="4398264"/>
+            <a:off x="960120" y="3892426"/>
             <a:ext cx="7315200" cy="182880"/>
           </a:xfrm>
           <a:prstGeom prst="rect">
@@ -19809,7 +19819,7 @@
         </p:nvSpPr>
         <p:spPr>
           <a:xfrm>
-            <a:off x="731520" y="4572000"/>
+            <a:off x="731520" y="4805462"/>
             <a:ext cx="7772400" cy="0"/>
           </a:xfrm>
           <a:prstGeom prst="line">
@@ -19828,45 +19838,6 @@
           <a:lstStyle/>
           <a:p>
             <a:endParaRPr lang="zh-CN" altLang="en-US"/>
-          </a:p>
-        </p:txBody>
-      </p:sp>
-      <p:sp>
-        <p:nvSpPr>
-          <p:cNvPr id="23" name="Text 21"/>
-          <p:cNvSpPr/>
-          <p:nvPr/>
-        </p:nvSpPr>
-        <p:spPr>
-          <a:xfrm>
-            <a:off x="731520" y="4663440"/>
-            <a:ext cx="7315200" cy="128016"/>
-          </a:xfrm>
-          <a:prstGeom prst="rect">
-            <a:avLst/>
-          </a:prstGeom>
-          <a:noFill/>
-          <a:ln/>
-        </p:spPr>
-        <p:txBody>
-          <a:bodyPr wrap="square" lIns="0" tIns="0" rIns="0" bIns="0" rtlCol="0" anchor="ctr"/>
-          <a:lstStyle/>
-          <a:p>
-            <a:pPr marL="0" indent="0">
-              <a:buNone/>
-            </a:pPr>
-            <a:r>
-              <a:rPr lang="en-US" sz="750" dirty="0">
-                <a:solidFill>
-                  <a:srgbClr val="00BFA5"/>
-                </a:solidFill>
-                <a:latin typeface="Consolas" pitchFamily="34" charset="0"/>
-                <a:ea typeface="Consolas" pitchFamily="34" charset="-122"/>
-                <a:cs typeface="Consolas" pitchFamily="34" charset="-120"/>
-              </a:rPr>
-              <a:t>github.com/newbison/AI_CHEMIST  ·  github.com/newbison/spc-batch-monitor</a:t>
-            </a:r>
-            <a:endParaRPr lang="en-US" sz="750" dirty="0"/>
           </a:p>
         </p:txBody>
       </p:sp>
